--- a/assets/pptx/catalog-92.pptx
+++ b/assets/pptx/catalog-92.pptx
@@ -3308,7 +3308,7 @@
                 <a:ea typeface="Ebrima"/>
                 <a:cs typeface="Ebrima"/>
               </a:rPr>
-              <a:t>ጠላቴን ከእግሬ ስር ጌታዬ አስረግጦኛል (2x)</a:t>
+              <a:t>ጠላቴን ከእግሬ ስር ጌታዬ አስረግጦኛል 2x</a:t>
             </a:r>
           </a:p>
         </p:txBody>
@@ -3411,7 +3411,7 @@
                 <a:ea typeface="Ebrima"/>
                 <a:cs typeface="Ebrima"/>
               </a:rPr>
-              <a:t>እንደመረጥከኝ አወቅሁ (2x)</a:t>
+              <a:t>እንደመረጥከኝ አወቅሁ 2x</a:t>
             </a:r>
           </a:p>
         </p:txBody>
@@ -3635,7 +3635,7 @@
                 <a:ea typeface="Ebrima"/>
                 <a:cs typeface="Ebrima"/>
               </a:rPr>
-              <a:t>የነፍሴ ቅኝቷ ሁሌ ክብር ክብር (2x)</a:t>
+              <a:t>የነፍሴ ቅኝቷ ሁሌ ክብር ክብር 2x</a:t>
             </a:r>
           </a:p>
         </p:txBody>
@@ -3702,7 +3702,7 @@
                 <a:ea typeface="Ebrima"/>
                 <a:cs typeface="Ebrima"/>
               </a:rPr>
-              <a:t>ዝናህን አወራለሁ (3x) ማዳንህን እናገራለሁ</a:t>
+              <a:t>ዝናህን አወራለሁ 3x ማዳንህን እናገራለሁ</a:t>
             </a:r>
           </a:p>
           <a:p>
@@ -3720,7 +3720,7 @@
                 <a:ea typeface="Ebrima"/>
                 <a:cs typeface="Ebrima"/>
               </a:rPr>
-              <a:t>ዝናህን አወራለሁ (3x) ማዳንህን እናገራለሁ</a:t>
+              <a:t>ዝናህን አወራለሁ 3x ማዳንህን እናገራለሁ</a:t>
             </a:r>
           </a:p>
         </p:txBody>
@@ -3787,7 +3787,7 @@
                 <a:ea typeface="Ebrima"/>
                 <a:cs typeface="Ebrima"/>
               </a:rPr>
-              <a:t>ክበር ከሚሉህ ጋር ንገሥ ከሚሉህ ጋር (2x)</a:t>
+              <a:t>ክበር ከሚሉህ ጋር ንገሥ ከሚሉህ ጋር 2x</a:t>
             </a:r>
           </a:p>
           <a:p>
@@ -3805,7 +3805,7 @@
                 <a:ea typeface="Ebrima"/>
                 <a:cs typeface="Ebrima"/>
               </a:rPr>
-              <a:t>እስማማለሁ እኔም እጨምራለሁ (4x)</a:t>
+              <a:t>እስማማለሁ እኔም እጨምራለሁ 4x</a:t>
             </a:r>
           </a:p>
           <a:p>
@@ -3823,7 +3823,7 @@
                 <a:ea typeface="Ebrima"/>
                 <a:cs typeface="Ebrima"/>
               </a:rPr>
-              <a:t>ክበር ከሚሉህ ጋር ንገሥ ከሚሉህ ጋር (2x)</a:t>
+              <a:t>ክበር ከሚሉህ ጋር ንገሥ ከሚሉህ ጋር 2x</a:t>
             </a:r>
           </a:p>
           <a:p>
@@ -3841,7 +3841,7 @@
                 <a:ea typeface="Ebrima"/>
                 <a:cs typeface="Ebrima"/>
               </a:rPr>
-              <a:t>እስማማለሁ እኔም እጨምራለሁ (4x)</a:t>
+              <a:t>እስማማለሁ እኔም እጨምራለሁ 4x</a:t>
             </a:r>
           </a:p>
         </p:txBody>
@@ -3944,7 +3944,7 @@
                 <a:ea typeface="Ebrima"/>
                 <a:cs typeface="Ebrima"/>
               </a:rPr>
-              <a:t>እሰዋለሁ አምልኮዬ ይኸው (2x)</a:t>
+              <a:t>እሰዋለሁ አምልኮዬ ይኸው 2x</a:t>
             </a:r>
           </a:p>
         </p:txBody>
@@ -4706,7 +4706,7 @@
                 <a:ea typeface="Ebrima"/>
                 <a:cs typeface="Ebrima"/>
               </a:rPr>
-              <a:t>ባለህ ምሥጋና ላይ ሌላም ልጨምርልህ (2x)</a:t>
+              <a:t>ባለህ ምሥጋና ላይ ሌላም ልጨምርልህ 2x</a:t>
             </a:r>
           </a:p>
         </p:txBody>
@@ -4773,7 +4773,7 @@
                 <a:ea typeface="Ebrima"/>
                 <a:cs typeface="Ebrima"/>
               </a:rPr>
-              <a:t>ዝናህን አወራለሁ (3x) ማዳንህን እናገራለሁ</a:t>
+              <a:t>ዝናህን አወራለሁ 3x ማዳንህን እናገራለሁ</a:t>
             </a:r>
           </a:p>
           <a:p>
@@ -4791,7 +4791,7 @@
                 <a:ea typeface="Ebrima"/>
                 <a:cs typeface="Ebrima"/>
               </a:rPr>
-              <a:t>ዝናህን አወራለሁ (3x) ማዳንህን እናገራለሁ</a:t>
+              <a:t>ዝናህን አወራለሁ 3x ማዳንህን እናገራለሁ</a:t>
             </a:r>
           </a:p>
         </p:txBody>
